--- a/FishSaleTracker_Final.pptx
+++ b/FishSaleTracker_Final.pptx
@@ -12834,31 +12834,6 @@
       </p:sp>
       <p:sp>
         <p:nvSpPr>
-          <p:cNvPr id="9" name="Shape 7"/>
-          <p:cNvSpPr/>
-          <p:nvPr/>
-        </p:nvSpPr>
-        <p:spPr>
-          <a:xfrm>
-            <a:off x="137160" y="1152144"/>
-            <a:ext cx="2240280" cy="274320"/>
-          </a:xfrm>
-          <a:prstGeom prst="rect">
-            <a:avLst/>
-          </a:prstGeom>
-          <a:solidFill>
-            <a:srgbClr val="0066CC"/>
-          </a:solidFill>
-          <a:ln w="12700">
-            <a:solidFill>
-              <a:srgbClr val="0066CC"/>
-            </a:solidFill>
-            <a:prstDash val="solid"/>
-          </a:ln>
-        </p:spPr>
-      </p:sp>
-      <p:sp>
-        <p:nvSpPr>
           <p:cNvPr id="10" name="Text 8"/>
           <p:cNvSpPr/>
           <p:nvPr/>
@@ -12898,120 +12873,6 @@
       </p:sp>
       <p:sp>
         <p:nvSpPr>
-          <p:cNvPr id="11" name="Shape 9"/>
-          <p:cNvSpPr/>
-          <p:nvPr/>
-        </p:nvSpPr>
-        <p:spPr>
-          <a:xfrm>
-            <a:off x="137160" y="1426464"/>
-            <a:ext cx="2240280" cy="1353312"/>
-          </a:xfrm>
-          <a:prstGeom prst="rect">
-            <a:avLst/>
-          </a:prstGeom>
-          <a:solidFill>
-            <a:srgbClr val="0A1628"/>
-          </a:solidFill>
-          <a:ln w="12700">
-            <a:solidFill>
-              <a:srgbClr val="1A3A5C"/>
-            </a:solidFill>
-            <a:prstDash val="solid"/>
-          </a:ln>
-        </p:spPr>
-      </p:sp>
-      <p:sp>
-        <p:nvSpPr>
-          <p:cNvPr id="12" name="Shape 10"/>
-          <p:cNvSpPr/>
-          <p:nvPr/>
-        </p:nvSpPr>
-        <p:spPr>
-          <a:xfrm>
-            <a:off x="137160" y="1426464"/>
-            <a:ext cx="2240280" cy="169164"/>
-          </a:xfrm>
-          <a:prstGeom prst="rect">
-            <a:avLst/>
-          </a:prstGeom>
-          <a:solidFill>
-            <a:srgbClr val="1A2A10"/>
-          </a:solidFill>
-          <a:ln w="6350">
-            <a:solidFill>
-              <a:srgbClr val="1A3A5C"/>
-            </a:solidFill>
-            <a:prstDash val="solid"/>
-          </a:ln>
-        </p:spPr>
-      </p:sp>
-      <p:sp>
-        <p:nvSpPr>
-          <p:cNvPr id="13" name="Shape 11"/>
-          <p:cNvSpPr/>
-          <p:nvPr/>
-        </p:nvSpPr>
-        <p:spPr>
-          <a:xfrm>
-            <a:off x="192024" y="1453896"/>
-            <a:ext cx="237744" cy="114300"/>
-          </a:xfrm>
-          <a:prstGeom prst="rect">
-            <a:avLst/>
-          </a:prstGeom>
-          <a:solidFill>
-            <a:srgbClr val="7A6200"/>
-          </a:solidFill>
-          <a:ln w="6350">
-            <a:solidFill>
-              <a:srgbClr val="F6D860"/>
-            </a:solidFill>
-            <a:prstDash val="solid"/>
-          </a:ln>
-        </p:spPr>
-      </p:sp>
-      <p:sp>
-        <p:nvSpPr>
-          <p:cNvPr id="14" name="Text 12"/>
-          <p:cNvSpPr/>
-          <p:nvPr/>
-        </p:nvSpPr>
-        <p:spPr>
-          <a:xfrm>
-            <a:off x="192024" y="1444752"/>
-            <a:ext cx="237744" cy="132588"/>
-          </a:xfrm>
-          <a:prstGeom prst="rect">
-            <a:avLst/>
-          </a:prstGeom>
-          <a:noFill/>
-          <a:ln/>
-        </p:spPr>
-        <p:txBody>
-          <a:bodyPr wrap="square" rtlCol="0" anchor="ctr"/>
-          <a:lstStyle/>
-          <a:p>
-            <a:pPr marL="0" indent="0" algn="ctr">
-              <a:buNone/>
-            </a:pPr>
-            <a:r>
-              <a:rPr lang="en-US" sz="600" b="1" dirty="0">
-                <a:solidFill>
-                  <a:srgbClr val="F6D860"/>
-                </a:solidFill>
-                <a:latin typeface="Calibri" pitchFamily="34" charset="0"/>
-                <a:ea typeface="Calibri" pitchFamily="34" charset="-122"/>
-                <a:cs typeface="Calibri" pitchFamily="34" charset="-120"/>
-              </a:rPr>
-              <a:t>PK</a:t>
-            </a:r>
-            <a:endParaRPr lang="en-US" sz="600" dirty="0"/>
-          </a:p>
-        </p:txBody>
-      </p:sp>
-      <p:sp>
-        <p:nvSpPr>
           <p:cNvPr id="15" name="Text 13"/>
           <p:cNvSpPr/>
           <p:nvPr/>
@@ -13129,70 +12990,6 @@
       </p:sp>
       <p:sp>
         <p:nvSpPr>
-          <p:cNvPr id="18" name="Shape 16"/>
-          <p:cNvSpPr/>
-          <p:nvPr/>
-        </p:nvSpPr>
-        <p:spPr>
-          <a:xfrm>
-            <a:off x="192024" y="1961388"/>
-            <a:ext cx="237744" cy="114300"/>
-          </a:xfrm>
-          <a:prstGeom prst="rect">
-            <a:avLst/>
-          </a:prstGeom>
-          <a:solidFill>
-            <a:srgbClr val="6A0040"/>
-          </a:solidFill>
-          <a:ln w="6350">
-            <a:solidFill>
-              <a:srgbClr val="F4A7C3"/>
-            </a:solidFill>
-            <a:prstDash val="solid"/>
-          </a:ln>
-        </p:spPr>
-      </p:sp>
-      <p:sp>
-        <p:nvSpPr>
-          <p:cNvPr id="19" name="Text 17"/>
-          <p:cNvSpPr/>
-          <p:nvPr/>
-        </p:nvSpPr>
-        <p:spPr>
-          <a:xfrm>
-            <a:off x="192024" y="1952244"/>
-            <a:ext cx="237744" cy="132588"/>
-          </a:xfrm>
-          <a:prstGeom prst="rect">
-            <a:avLst/>
-          </a:prstGeom>
-          <a:noFill/>
-          <a:ln/>
-        </p:spPr>
-        <p:txBody>
-          <a:bodyPr wrap="square" rtlCol="0" anchor="ctr"/>
-          <a:lstStyle/>
-          <a:p>
-            <a:pPr marL="0" indent="0" algn="ctr">
-              <a:buNone/>
-            </a:pPr>
-            <a:r>
-              <a:rPr lang="en-US" sz="600" b="1" dirty="0">
-                <a:solidFill>
-                  <a:srgbClr val="F4A7C3"/>
-                </a:solidFill>
-                <a:latin typeface="Calibri" pitchFamily="34" charset="0"/>
-                <a:ea typeface="Calibri" pitchFamily="34" charset="-122"/>
-                <a:cs typeface="Calibri" pitchFamily="34" charset="-120"/>
-              </a:rPr>
-              <a:t>UQ</a:t>
-            </a:r>
-            <a:endParaRPr lang="en-US" sz="600" dirty="0"/>
-          </a:p>
-        </p:txBody>
-      </p:sp>
-      <p:sp>
-        <p:nvSpPr>
           <p:cNvPr id="20" name="Text 18"/>
           <p:cNvSpPr/>
           <p:nvPr/>
@@ -13232,70 +13029,6 @@
       </p:sp>
       <p:sp>
         <p:nvSpPr>
-          <p:cNvPr id="21" name="Shape 19"/>
-          <p:cNvSpPr/>
-          <p:nvPr/>
-        </p:nvSpPr>
-        <p:spPr>
-          <a:xfrm>
-            <a:off x="192024" y="2130552"/>
-            <a:ext cx="237744" cy="114300"/>
-          </a:xfrm>
-          <a:prstGeom prst="rect">
-            <a:avLst/>
-          </a:prstGeom>
-          <a:solidFill>
-            <a:srgbClr val="6A0040"/>
-          </a:solidFill>
-          <a:ln w="6350">
-            <a:solidFill>
-              <a:srgbClr val="F4A7C3"/>
-            </a:solidFill>
-            <a:prstDash val="solid"/>
-          </a:ln>
-        </p:spPr>
-      </p:sp>
-      <p:sp>
-        <p:nvSpPr>
-          <p:cNvPr id="22" name="Text 20"/>
-          <p:cNvSpPr/>
-          <p:nvPr/>
-        </p:nvSpPr>
-        <p:spPr>
-          <a:xfrm>
-            <a:off x="192024" y="2121408"/>
-            <a:ext cx="237744" cy="132588"/>
-          </a:xfrm>
-          <a:prstGeom prst="rect">
-            <a:avLst/>
-          </a:prstGeom>
-          <a:noFill/>
-          <a:ln/>
-        </p:spPr>
-        <p:txBody>
-          <a:bodyPr wrap="square" rtlCol="0" anchor="ctr"/>
-          <a:lstStyle/>
-          <a:p>
-            <a:pPr marL="0" indent="0" algn="ctr">
-              <a:buNone/>
-            </a:pPr>
-            <a:r>
-              <a:rPr lang="en-US" sz="600" b="1" dirty="0">
-                <a:solidFill>
-                  <a:srgbClr val="F4A7C3"/>
-                </a:solidFill>
-                <a:latin typeface="Calibri" pitchFamily="34" charset="0"/>
-                <a:ea typeface="Calibri" pitchFamily="34" charset="-122"/>
-                <a:cs typeface="Calibri" pitchFamily="34" charset="-120"/>
-              </a:rPr>
-              <a:t>UQ</a:t>
-            </a:r>
-            <a:endParaRPr lang="en-US" sz="600" dirty="0"/>
-          </a:p>
-        </p:txBody>
-      </p:sp>
-      <p:sp>
-        <p:nvSpPr>
           <p:cNvPr id="23" name="Text 21"/>
           <p:cNvSpPr/>
           <p:nvPr/>
@@ -13452,31 +13185,6 @@
       </p:sp>
       <p:sp>
         <p:nvSpPr>
-          <p:cNvPr id="27" name="Shape 25"/>
-          <p:cNvSpPr/>
-          <p:nvPr/>
-        </p:nvSpPr>
-        <p:spPr>
-          <a:xfrm>
-            <a:off x="6766560" y="1152144"/>
-            <a:ext cx="2240280" cy="274320"/>
-          </a:xfrm>
-          <a:prstGeom prst="rect">
-            <a:avLst/>
-          </a:prstGeom>
-          <a:solidFill>
-            <a:srgbClr val="2E7D32"/>
-          </a:solidFill>
-          <a:ln w="12700">
-            <a:solidFill>
-              <a:srgbClr val="2E7D32"/>
-            </a:solidFill>
-            <a:prstDash val="solid"/>
-          </a:ln>
-        </p:spPr>
-      </p:sp>
-      <p:sp>
-        <p:nvSpPr>
           <p:cNvPr id="28" name="Text 26"/>
           <p:cNvSpPr/>
           <p:nvPr/>
@@ -13516,56 +13224,6 @@
       </p:sp>
       <p:sp>
         <p:nvSpPr>
-          <p:cNvPr id="29" name="Shape 27"/>
-          <p:cNvSpPr/>
-          <p:nvPr/>
-        </p:nvSpPr>
-        <p:spPr>
-          <a:xfrm>
-            <a:off x="6766560" y="1426464"/>
-            <a:ext cx="2240280" cy="1184148"/>
-          </a:xfrm>
-          <a:prstGeom prst="rect">
-            <a:avLst/>
-          </a:prstGeom>
-          <a:solidFill>
-            <a:srgbClr val="0A1628"/>
-          </a:solidFill>
-          <a:ln w="12700">
-            <a:solidFill>
-              <a:srgbClr val="1A3A5C"/>
-            </a:solidFill>
-            <a:prstDash val="solid"/>
-          </a:ln>
-        </p:spPr>
-      </p:sp>
-      <p:sp>
-        <p:nvSpPr>
-          <p:cNvPr id="30" name="Shape 28"/>
-          <p:cNvSpPr/>
-          <p:nvPr/>
-        </p:nvSpPr>
-        <p:spPr>
-          <a:xfrm>
-            <a:off x="6766560" y="1426464"/>
-            <a:ext cx="2240280" cy="169164"/>
-          </a:xfrm>
-          <a:prstGeom prst="rect">
-            <a:avLst/>
-          </a:prstGeom>
-          <a:solidFill>
-            <a:srgbClr val="1A2A10"/>
-          </a:solidFill>
-          <a:ln w="6350">
-            <a:solidFill>
-              <a:srgbClr val="1A3A5C"/>
-            </a:solidFill>
-            <a:prstDash val="solid"/>
-          </a:ln>
-        </p:spPr>
-      </p:sp>
-      <p:sp>
-        <p:nvSpPr>
           <p:cNvPr id="31" name="Shape 29"/>
           <p:cNvSpPr/>
           <p:nvPr/>
@@ -14493,31 +14151,6 @@
       </p:sp>
       <p:sp>
         <p:nvSpPr>
-          <p:cNvPr id="58" name="Shape 56"/>
-          <p:cNvSpPr/>
-          <p:nvPr/>
-        </p:nvSpPr>
-        <p:spPr>
-          <a:xfrm>
-            <a:off x="137160" y="3401568"/>
-            <a:ext cx="2240280" cy="274320"/>
-          </a:xfrm>
-          <a:prstGeom prst="rect">
-            <a:avLst/>
-          </a:prstGeom>
-          <a:solidFill>
-            <a:srgbClr val="E65100"/>
-          </a:solidFill>
-          <a:ln w="12700">
-            <a:solidFill>
-              <a:srgbClr val="E65100"/>
-            </a:solidFill>
-            <a:prstDash val="solid"/>
-          </a:ln>
-        </p:spPr>
-      </p:sp>
-      <p:sp>
-        <p:nvSpPr>
           <p:cNvPr id="59" name="Text 57"/>
           <p:cNvSpPr/>
           <p:nvPr/>
@@ -14557,120 +14190,6 @@
       </p:sp>
       <p:sp>
         <p:nvSpPr>
-          <p:cNvPr id="60" name="Shape 58"/>
-          <p:cNvSpPr/>
-          <p:nvPr/>
-        </p:nvSpPr>
-        <p:spPr>
-          <a:xfrm>
-            <a:off x="137160" y="3675888"/>
-            <a:ext cx="2240280" cy="676656"/>
-          </a:xfrm>
-          <a:prstGeom prst="rect">
-            <a:avLst/>
-          </a:prstGeom>
-          <a:solidFill>
-            <a:srgbClr val="0A1628"/>
-          </a:solidFill>
-          <a:ln w="12700">
-            <a:solidFill>
-              <a:srgbClr val="1A3A5C"/>
-            </a:solidFill>
-            <a:prstDash val="solid"/>
-          </a:ln>
-        </p:spPr>
-      </p:sp>
-      <p:sp>
-        <p:nvSpPr>
-          <p:cNvPr id="61" name="Shape 59"/>
-          <p:cNvSpPr/>
-          <p:nvPr/>
-        </p:nvSpPr>
-        <p:spPr>
-          <a:xfrm>
-            <a:off x="137160" y="3675888"/>
-            <a:ext cx="2240280" cy="169164"/>
-          </a:xfrm>
-          <a:prstGeom prst="rect">
-            <a:avLst/>
-          </a:prstGeom>
-          <a:solidFill>
-            <a:srgbClr val="1A2A10"/>
-          </a:solidFill>
-          <a:ln w="6350">
-            <a:solidFill>
-              <a:srgbClr val="1A3A5C"/>
-            </a:solidFill>
-            <a:prstDash val="solid"/>
-          </a:ln>
-        </p:spPr>
-      </p:sp>
-      <p:sp>
-        <p:nvSpPr>
-          <p:cNvPr id="62" name="Shape 60"/>
-          <p:cNvSpPr/>
-          <p:nvPr/>
-        </p:nvSpPr>
-        <p:spPr>
-          <a:xfrm>
-            <a:off x="192024" y="3703320"/>
-            <a:ext cx="237744" cy="114300"/>
-          </a:xfrm>
-          <a:prstGeom prst="rect">
-            <a:avLst/>
-          </a:prstGeom>
-          <a:solidFill>
-            <a:srgbClr val="7A6200"/>
-          </a:solidFill>
-          <a:ln w="6350">
-            <a:solidFill>
-              <a:srgbClr val="F6D860"/>
-            </a:solidFill>
-            <a:prstDash val="solid"/>
-          </a:ln>
-        </p:spPr>
-      </p:sp>
-      <p:sp>
-        <p:nvSpPr>
-          <p:cNvPr id="63" name="Text 61"/>
-          <p:cNvSpPr/>
-          <p:nvPr/>
-        </p:nvSpPr>
-        <p:spPr>
-          <a:xfrm>
-            <a:off x="192024" y="3694176"/>
-            <a:ext cx="237744" cy="132588"/>
-          </a:xfrm>
-          <a:prstGeom prst="rect">
-            <a:avLst/>
-          </a:prstGeom>
-          <a:noFill/>
-          <a:ln/>
-        </p:spPr>
-        <p:txBody>
-          <a:bodyPr wrap="square" rtlCol="0" anchor="ctr"/>
-          <a:lstStyle/>
-          <a:p>
-            <a:pPr marL="0" indent="0" algn="ctr">
-              <a:buNone/>
-            </a:pPr>
-            <a:r>
-              <a:rPr lang="en-US" sz="600" b="1" dirty="0">
-                <a:solidFill>
-                  <a:srgbClr val="F6D860"/>
-                </a:solidFill>
-                <a:latin typeface="Calibri" pitchFamily="34" charset="0"/>
-                <a:ea typeface="Calibri" pitchFamily="34" charset="-122"/>
-                <a:cs typeface="Calibri" pitchFamily="34" charset="-120"/>
-              </a:rPr>
-              <a:t>PK</a:t>
-            </a:r>
-            <a:endParaRPr lang="en-US" sz="600" dirty="0"/>
-          </a:p>
-        </p:txBody>
-      </p:sp>
-      <p:sp>
-        <p:nvSpPr>
           <p:cNvPr id="64" name="Text 62"/>
           <p:cNvSpPr/>
           <p:nvPr/>
@@ -14710,70 +14229,6 @@
       </p:sp>
       <p:sp>
         <p:nvSpPr>
-          <p:cNvPr id="65" name="Shape 63"/>
-          <p:cNvSpPr/>
-          <p:nvPr/>
-        </p:nvSpPr>
-        <p:spPr>
-          <a:xfrm>
-            <a:off x="192024" y="3872484"/>
-            <a:ext cx="237744" cy="114300"/>
-          </a:xfrm>
-          <a:prstGeom prst="rect">
-            <a:avLst/>
-          </a:prstGeom>
-          <a:solidFill>
-            <a:srgbClr val="6A0040"/>
-          </a:solidFill>
-          <a:ln w="6350">
-            <a:solidFill>
-              <a:srgbClr val="F4A7C3"/>
-            </a:solidFill>
-            <a:prstDash val="solid"/>
-          </a:ln>
-        </p:spPr>
-      </p:sp>
-      <p:sp>
-        <p:nvSpPr>
-          <p:cNvPr id="66" name="Text 64"/>
-          <p:cNvSpPr/>
-          <p:nvPr/>
-        </p:nvSpPr>
-        <p:spPr>
-          <a:xfrm>
-            <a:off x="192024" y="3863340"/>
-            <a:ext cx="237744" cy="132588"/>
-          </a:xfrm>
-          <a:prstGeom prst="rect">
-            <a:avLst/>
-          </a:prstGeom>
-          <a:noFill/>
-          <a:ln/>
-        </p:spPr>
-        <p:txBody>
-          <a:bodyPr wrap="square" rtlCol="0" anchor="ctr"/>
-          <a:lstStyle/>
-          <a:p>
-            <a:pPr marL="0" indent="0" algn="ctr">
-              <a:buNone/>
-            </a:pPr>
-            <a:r>
-              <a:rPr lang="en-US" sz="600" b="1" dirty="0">
-                <a:solidFill>
-                  <a:srgbClr val="F4A7C3"/>
-                </a:solidFill>
-                <a:latin typeface="Calibri" pitchFamily="34" charset="0"/>
-                <a:ea typeface="Calibri" pitchFamily="34" charset="-122"/>
-                <a:cs typeface="Calibri" pitchFamily="34" charset="-120"/>
-              </a:rPr>
-              <a:t>UQ</a:t>
-            </a:r>
-            <a:endParaRPr lang="en-US" sz="600" dirty="0"/>
-          </a:p>
-        </p:txBody>
-      </p:sp>
-      <p:sp>
-        <p:nvSpPr>
           <p:cNvPr id="67" name="Text 65"/>
           <p:cNvSpPr/>
           <p:nvPr/>
@@ -15895,6 +15350,36 @@
           </a:p>
         </p:txBody>
       </p:sp>
+      <p:pic>
+        <p:nvPicPr>
+          <p:cNvPr id="112" name="Picture 111">
+            <a:extLst>
+              <a:ext uri="{FF2B5EF4-FFF2-40B4-BE49-F238E27FC236}">
+                <a16:creationId xmlns:a16="http://schemas.microsoft.com/office/drawing/2014/main" id="{64770AF4-D14F-D5A3-1695-AE484B7E2C25}"/>
+              </a:ext>
+            </a:extLst>
+          </p:cNvPr>
+          <p:cNvPicPr>
+            <a:picLocks noChangeAspect="1"/>
+          </p:cNvPicPr>
+          <p:nvPr/>
+        </p:nvPicPr>
+        <p:blipFill>
+          <a:blip r:embed="rId3"/>
+          <a:stretch>
+            <a:fillRect/>
+          </a:stretch>
+        </p:blipFill>
+        <p:spPr>
+          <a:xfrm>
+            <a:off x="365760" y="1168908"/>
+            <a:ext cx="8412480" cy="3686556"/>
+          </a:xfrm>
+          <a:prstGeom prst="rect">
+            <a:avLst/>
+          </a:prstGeom>
+        </p:spPr>
+      </p:pic>
     </p:spTree>
   </p:cSld>
   <p:clrMapOvr>
